--- a/耶穌在我裡面.pptx
+++ b/耶穌在我裡面.pptx
@@ -310,7 +310,7 @@
           <a:p>
             <a:fld id="{DBB631E9-9F00-4D46-8FD6-D0B94D862A5F}" type="datetimeFigureOut">
               <a:rPr lang="zh-TW" altLang="en-US" smtClean="0"/>
-              <a:t>2023/12/5</a:t>
+              <a:t>2025/9/27</a:t>
             </a:fld>
             <a:endParaRPr lang="zh-TW" altLang="en-US"/>
           </a:p>
@@ -473,7 +473,7 @@
           <a:p>
             <a:fld id="{DBB631E9-9F00-4D46-8FD6-D0B94D862A5F}" type="datetimeFigureOut">
               <a:rPr lang="zh-TW" altLang="en-US" smtClean="0"/>
-              <a:t>2023/12/5</a:t>
+              <a:t>2025/9/27</a:t>
             </a:fld>
             <a:endParaRPr lang="zh-TW" altLang="en-US"/>
           </a:p>
@@ -646,7 +646,7 @@
           <a:p>
             <a:fld id="{DBB631E9-9F00-4D46-8FD6-D0B94D862A5F}" type="datetimeFigureOut">
               <a:rPr lang="zh-TW" altLang="en-US" smtClean="0"/>
-              <a:t>2023/12/5</a:t>
+              <a:t>2025/9/27</a:t>
             </a:fld>
             <a:endParaRPr lang="zh-TW" altLang="en-US"/>
           </a:p>
@@ -809,7 +809,7 @@
           <a:p>
             <a:fld id="{DBB631E9-9F00-4D46-8FD6-D0B94D862A5F}" type="datetimeFigureOut">
               <a:rPr lang="zh-TW" altLang="en-US" smtClean="0"/>
-              <a:t>2023/12/5</a:t>
+              <a:t>2025/9/27</a:t>
             </a:fld>
             <a:endParaRPr lang="zh-TW" altLang="en-US"/>
           </a:p>
@@ -1049,7 +1049,7 @@
           <a:p>
             <a:fld id="{DBB631E9-9F00-4D46-8FD6-D0B94D862A5F}" type="datetimeFigureOut">
               <a:rPr lang="zh-TW" altLang="en-US" smtClean="0"/>
-              <a:t>2023/12/5</a:t>
+              <a:t>2025/9/27</a:t>
             </a:fld>
             <a:endParaRPr lang="zh-TW" altLang="en-US"/>
           </a:p>
@@ -1329,7 +1329,7 @@
           <a:p>
             <a:fld id="{DBB631E9-9F00-4D46-8FD6-D0B94D862A5F}" type="datetimeFigureOut">
               <a:rPr lang="zh-TW" altLang="en-US" smtClean="0"/>
-              <a:t>2023/12/5</a:t>
+              <a:t>2025/9/27</a:t>
             </a:fld>
             <a:endParaRPr lang="zh-TW" altLang="en-US"/>
           </a:p>
@@ -1743,7 +1743,7 @@
           <a:p>
             <a:fld id="{DBB631E9-9F00-4D46-8FD6-D0B94D862A5F}" type="datetimeFigureOut">
               <a:rPr lang="zh-TW" altLang="en-US" smtClean="0"/>
-              <a:t>2023/12/5</a:t>
+              <a:t>2025/9/27</a:t>
             </a:fld>
             <a:endParaRPr lang="zh-TW" altLang="en-US"/>
           </a:p>
@@ -1855,7 +1855,7 @@
           <a:p>
             <a:fld id="{DBB631E9-9F00-4D46-8FD6-D0B94D862A5F}" type="datetimeFigureOut">
               <a:rPr lang="zh-TW" altLang="en-US" smtClean="0"/>
-              <a:t>2023/12/5</a:t>
+              <a:t>2025/9/27</a:t>
             </a:fld>
             <a:endParaRPr lang="zh-TW" altLang="en-US"/>
           </a:p>
@@ -1945,7 +1945,7 @@
           <a:p>
             <a:fld id="{DBB631E9-9F00-4D46-8FD6-D0B94D862A5F}" type="datetimeFigureOut">
               <a:rPr lang="zh-TW" altLang="en-US" smtClean="0"/>
-              <a:t>2023/12/5</a:t>
+              <a:t>2025/9/27</a:t>
             </a:fld>
             <a:endParaRPr lang="zh-TW" altLang="en-US"/>
           </a:p>
@@ -2215,7 +2215,7 @@
           <a:p>
             <a:fld id="{DBB631E9-9F00-4D46-8FD6-D0B94D862A5F}" type="datetimeFigureOut">
               <a:rPr lang="zh-TW" altLang="en-US" smtClean="0"/>
-              <a:t>2023/12/5</a:t>
+              <a:t>2025/9/27</a:t>
             </a:fld>
             <a:endParaRPr lang="zh-TW" altLang="en-US"/>
           </a:p>
@@ -2465,7 +2465,7 @@
           <a:p>
             <a:fld id="{DBB631E9-9F00-4D46-8FD6-D0B94D862A5F}" type="datetimeFigureOut">
               <a:rPr lang="zh-TW" altLang="en-US" smtClean="0"/>
-              <a:t>2023/12/5</a:t>
+              <a:t>2025/9/27</a:t>
             </a:fld>
             <a:endParaRPr lang="zh-TW" altLang="en-US"/>
           </a:p>
@@ -2676,7 +2676,7 @@
           <a:p>
             <a:fld id="{DBB631E9-9F00-4D46-8FD6-D0B94D862A5F}" type="datetimeFigureOut">
               <a:rPr lang="zh-TW" altLang="en-US" smtClean="0"/>
-              <a:t>2023/12/5</a:t>
+              <a:t>2025/9/27</a:t>
             </a:fld>
             <a:endParaRPr lang="zh-TW" altLang="en-US"/>
           </a:p>
@@ -3158,14 +3158,24 @@
               <a:buNone/>
             </a:pPr>
             <a:r>
-              <a:rPr lang="zh-TW" altLang="en-US" sz="4800" b="1" dirty="0">
+              <a:rPr lang="zh-CN" altLang="en-US" sz="4800" b="1" dirty="0">
                 <a:solidFill>
                   <a:srgbClr val="000066"/>
                 </a:solidFill>
                 <a:latin typeface="微軟正黑體" pitchFamily="34" charset="-120"/>
                 <a:ea typeface="微軟正黑體" pitchFamily="34" charset="-120"/>
               </a:rPr>
-              <a:t>嘗過主恩的滋味</a:t>
+              <a:t>嚐</a:t>
+            </a:r>
+            <a:r>
+              <a:rPr lang="zh-TW" altLang="en-US" sz="4800" b="1" dirty="0">
+                <a:solidFill>
+                  <a:srgbClr val="000066"/>
+                </a:solidFill>
+                <a:latin typeface="微軟正黑體" pitchFamily="34" charset="-120"/>
+                <a:ea typeface="微軟正黑體" pitchFamily="34" charset="-120"/>
+              </a:rPr>
+              <a:t>過主恩的滋味</a:t>
             </a:r>
             <a:endParaRPr lang="en-US" altLang="zh-TW" sz="4800" b="1" dirty="0">
               <a:solidFill>
